--- a/Tetris/design.pptx
+++ b/Tetris/design.pptx
@@ -259,7 +259,7 @@
           <a:p>
             <a:fld id="{D8BCD137-A6BF-4F49-B207-A04483CBB165}" type="datetimeFigureOut">
               <a:rPr lang="en-US" smtClean="0"/>
-              <a:t>4/22/2026</a:t>
+              <a:t>5/8/2026</a:t>
             </a:fld>
             <a:endParaRPr lang="en-US"/>
           </a:p>
@@ -457,7 +457,7 @@
           <a:p>
             <a:fld id="{D8BCD137-A6BF-4F49-B207-A04483CBB165}" type="datetimeFigureOut">
               <a:rPr lang="en-US" smtClean="0"/>
-              <a:t>4/22/2026</a:t>
+              <a:t>5/8/2026</a:t>
             </a:fld>
             <a:endParaRPr lang="en-US"/>
           </a:p>
@@ -665,7 +665,7 @@
           <a:p>
             <a:fld id="{D8BCD137-A6BF-4F49-B207-A04483CBB165}" type="datetimeFigureOut">
               <a:rPr lang="en-US" smtClean="0"/>
-              <a:t>4/22/2026</a:t>
+              <a:t>5/8/2026</a:t>
             </a:fld>
             <a:endParaRPr lang="en-US"/>
           </a:p>
@@ -863,7 +863,7 @@
           <a:p>
             <a:fld id="{D8BCD137-A6BF-4F49-B207-A04483CBB165}" type="datetimeFigureOut">
               <a:rPr lang="en-US" smtClean="0"/>
-              <a:t>4/22/2026</a:t>
+              <a:t>5/8/2026</a:t>
             </a:fld>
             <a:endParaRPr lang="en-US"/>
           </a:p>
@@ -1138,7 +1138,7 @@
           <a:p>
             <a:fld id="{D8BCD137-A6BF-4F49-B207-A04483CBB165}" type="datetimeFigureOut">
               <a:rPr lang="en-US" smtClean="0"/>
-              <a:t>4/22/2026</a:t>
+              <a:t>5/8/2026</a:t>
             </a:fld>
             <a:endParaRPr lang="en-US"/>
           </a:p>
@@ -1403,7 +1403,7 @@
           <a:p>
             <a:fld id="{D8BCD137-A6BF-4F49-B207-A04483CBB165}" type="datetimeFigureOut">
               <a:rPr lang="en-US" smtClean="0"/>
-              <a:t>4/22/2026</a:t>
+              <a:t>5/8/2026</a:t>
             </a:fld>
             <a:endParaRPr lang="en-US"/>
           </a:p>
@@ -1815,7 +1815,7 @@
           <a:p>
             <a:fld id="{D8BCD137-A6BF-4F49-B207-A04483CBB165}" type="datetimeFigureOut">
               <a:rPr lang="en-US" smtClean="0"/>
-              <a:t>4/22/2026</a:t>
+              <a:t>5/8/2026</a:t>
             </a:fld>
             <a:endParaRPr lang="en-US"/>
           </a:p>
@@ -1956,7 +1956,7 @@
           <a:p>
             <a:fld id="{D8BCD137-A6BF-4F49-B207-A04483CBB165}" type="datetimeFigureOut">
               <a:rPr lang="en-US" smtClean="0"/>
-              <a:t>4/22/2026</a:t>
+              <a:t>5/8/2026</a:t>
             </a:fld>
             <a:endParaRPr lang="en-US"/>
           </a:p>
@@ -2069,7 +2069,7 @@
           <a:p>
             <a:fld id="{D8BCD137-A6BF-4F49-B207-A04483CBB165}" type="datetimeFigureOut">
               <a:rPr lang="en-US" smtClean="0"/>
-              <a:t>4/22/2026</a:t>
+              <a:t>5/8/2026</a:t>
             </a:fld>
             <a:endParaRPr lang="en-US"/>
           </a:p>
@@ -2380,7 +2380,7 @@
           <a:p>
             <a:fld id="{D8BCD137-A6BF-4F49-B207-A04483CBB165}" type="datetimeFigureOut">
               <a:rPr lang="en-US" smtClean="0"/>
-              <a:t>4/22/2026</a:t>
+              <a:t>5/8/2026</a:t>
             </a:fld>
             <a:endParaRPr lang="en-US"/>
           </a:p>
@@ -2668,7 +2668,7 @@
           <a:p>
             <a:fld id="{D8BCD137-A6BF-4F49-B207-A04483CBB165}" type="datetimeFigureOut">
               <a:rPr lang="en-US" smtClean="0"/>
-              <a:t>4/22/2026</a:t>
+              <a:t>5/8/2026</a:t>
             </a:fld>
             <a:endParaRPr lang="en-US"/>
           </a:p>
@@ -2909,7 +2909,7 @@
           <a:p>
             <a:fld id="{D8BCD137-A6BF-4F49-B207-A04483CBB165}" type="datetimeFigureOut">
               <a:rPr lang="en-US" smtClean="0"/>
-              <a:t>4/22/2026</a:t>
+              <a:t>5/8/2026</a:t>
             </a:fld>
             <a:endParaRPr lang="en-US"/>
           </a:p>
@@ -5039,7 +5039,7 @@
           <p:spPr>
             <a:xfrm>
               <a:off x="3555410" y="462732"/>
-              <a:ext cx="1367645" cy="646331"/>
+              <a:ext cx="1367645" cy="461665"/>
             </a:xfrm>
             <a:prstGeom prst="rect">
               <a:avLst/>
@@ -5064,12 +5064,6 @@
                 <a:t>Shift_en</a:t>
               </a:r>
               <a:endParaRPr lang="en-US" sz="1200" dirty="0"/>
-            </a:p>
-            <a:p>
-              <a:r>
-                <a:rPr lang="en-US" sz="1200" dirty="0"/>
-                <a:t>score</a:t>
-              </a:r>
             </a:p>
           </p:txBody>
         </p:sp>
@@ -5842,7 +5836,7 @@
         <p:spPr>
           <a:xfrm>
             <a:off x="7951646" y="1273986"/>
-            <a:ext cx="598220" cy="1906368"/>
+            <a:ext cx="598220" cy="1993066"/>
           </a:xfrm>
           <a:prstGeom prst="bentConnector3">
             <a:avLst>
@@ -5906,6 +5900,738 @@
           </a:fontRef>
         </p:style>
       </p:cxnSp>
+      <p:grpSp>
+        <p:nvGrpSpPr>
+          <p:cNvPr id="2" name="Group 1">
+            <a:extLst>
+              <a:ext uri="{FF2B5EF4-FFF2-40B4-BE49-F238E27FC236}">
+                <a16:creationId xmlns:a16="http://schemas.microsoft.com/office/drawing/2014/main" id="{0A273859-F354-8FEF-1E95-A08D4A3D1C0F}"/>
+              </a:ext>
+            </a:extLst>
+          </p:cNvPr>
+          <p:cNvGrpSpPr/>
+          <p:nvPr/>
+        </p:nvGrpSpPr>
+        <p:grpSpPr>
+          <a:xfrm>
+            <a:off x="7865657" y="3791634"/>
+            <a:ext cx="2503148" cy="1133585"/>
+            <a:chOff x="2641082" y="94236"/>
+            <a:chExt cx="2503148" cy="1133585"/>
+          </a:xfrm>
+        </p:grpSpPr>
+        <p:grpSp>
+          <p:nvGrpSpPr>
+            <p:cNvPr id="10" name="Group 9">
+              <a:extLst>
+                <a:ext uri="{FF2B5EF4-FFF2-40B4-BE49-F238E27FC236}">
+                  <a16:creationId xmlns:a16="http://schemas.microsoft.com/office/drawing/2014/main" id="{93B4A338-E3AC-D1D9-398D-5F72CD865BDE}"/>
+                </a:ext>
+              </a:extLst>
+            </p:cNvPr>
+            <p:cNvGrpSpPr/>
+            <p:nvPr/>
+          </p:nvGrpSpPr>
+          <p:grpSpPr>
+            <a:xfrm>
+              <a:off x="2641082" y="94236"/>
+              <a:ext cx="1970423" cy="1133585"/>
+              <a:chOff x="2641082" y="94236"/>
+              <a:chExt cx="1970423" cy="1133585"/>
+            </a:xfrm>
+          </p:grpSpPr>
+          <p:sp>
+            <p:nvSpPr>
+              <p:cNvPr id="19" name="Rectangle 18">
+                <a:extLst>
+                  <a:ext uri="{FF2B5EF4-FFF2-40B4-BE49-F238E27FC236}">
+                    <a16:creationId xmlns:a16="http://schemas.microsoft.com/office/drawing/2014/main" id="{C3BD53EA-0F11-709A-8930-FA1EE15E8CDA}"/>
+                  </a:ext>
+                </a:extLst>
+              </p:cNvPr>
+              <p:cNvSpPr/>
+              <p:nvPr/>
+            </p:nvSpPr>
+            <p:spPr>
+              <a:xfrm>
+                <a:off x="2641083" y="94237"/>
+                <a:ext cx="1970422" cy="1133584"/>
+              </a:xfrm>
+              <a:prstGeom prst="rect">
+                <a:avLst/>
+              </a:prstGeom>
+              <a:solidFill>
+                <a:schemeClr val="bg1"/>
+              </a:solidFill>
+            </p:spPr>
+            <p:style>
+              <a:lnRef idx="2">
+                <a:schemeClr val="accent1">
+                  <a:shade val="15000"/>
+                </a:schemeClr>
+              </a:lnRef>
+              <a:fillRef idx="1">
+                <a:schemeClr val="accent1"/>
+              </a:fillRef>
+              <a:effectRef idx="0">
+                <a:schemeClr val="accent1"/>
+              </a:effectRef>
+              <a:fontRef idx="minor">
+                <a:schemeClr val="lt1"/>
+              </a:fontRef>
+            </p:style>
+            <p:txBody>
+              <a:bodyPr rtlCol="0" anchor="ctr"/>
+              <a:lstStyle/>
+              <a:p>
+                <a:pPr algn="ctr"/>
+                <a:endParaRPr lang="en-US" dirty="0"/>
+              </a:p>
+            </p:txBody>
+          </p:sp>
+          <p:sp>
+            <p:nvSpPr>
+              <p:cNvPr id="20" name="TextBox 19">
+                <a:extLst>
+                  <a:ext uri="{FF2B5EF4-FFF2-40B4-BE49-F238E27FC236}">
+                    <a16:creationId xmlns:a16="http://schemas.microsoft.com/office/drawing/2014/main" id="{DB07A024-0E1C-BA79-30D0-2FDF9B26B6A4}"/>
+                  </a:ext>
+                </a:extLst>
+              </p:cNvPr>
+              <p:cNvSpPr txBox="1"/>
+              <p:nvPr/>
+            </p:nvSpPr>
+            <p:spPr>
+              <a:xfrm>
+                <a:off x="2641082" y="94236"/>
+                <a:ext cx="1721334" cy="369332"/>
+              </a:xfrm>
+              <a:prstGeom prst="rect">
+                <a:avLst/>
+              </a:prstGeom>
+              <a:noFill/>
+            </p:spPr>
+            <p:txBody>
+              <a:bodyPr wrap="square" rtlCol="0">
+                <a:spAutoFit/>
+              </a:bodyPr>
+              <a:lstStyle/>
+              <a:p>
+                <a:r>
+                  <a:rPr lang="en-US" b="1" dirty="0"/>
+                  <a:t>Score Counter</a:t>
+                </a:r>
+              </a:p>
+            </p:txBody>
+          </p:sp>
+          <p:sp>
+            <p:nvSpPr>
+              <p:cNvPr id="21" name="TextBox 20">
+                <a:extLst>
+                  <a:ext uri="{FF2B5EF4-FFF2-40B4-BE49-F238E27FC236}">
+                    <a16:creationId xmlns:a16="http://schemas.microsoft.com/office/drawing/2014/main" id="{C81AA216-9F44-A2F2-7FBD-5A61C2837A6B}"/>
+                  </a:ext>
+                </a:extLst>
+              </p:cNvPr>
+              <p:cNvSpPr txBox="1"/>
+              <p:nvPr/>
+            </p:nvSpPr>
+            <p:spPr>
+              <a:xfrm>
+                <a:off x="2644990" y="396823"/>
+                <a:ext cx="1367645" cy="830997"/>
+              </a:xfrm>
+              <a:prstGeom prst="rect">
+                <a:avLst/>
+              </a:prstGeom>
+              <a:noFill/>
+            </p:spPr>
+            <p:txBody>
+              <a:bodyPr wrap="square" rtlCol="0">
+                <a:spAutoFit/>
+              </a:bodyPr>
+              <a:lstStyle/>
+              <a:p>
+                <a:r>
+                  <a:rPr lang="en-US" sz="1200" dirty="0" err="1"/>
+                  <a:t>Clk</a:t>
+                </a:r>
+                <a:endParaRPr lang="en-US" sz="1200" dirty="0"/>
+              </a:p>
+              <a:p>
+                <a:r>
+                  <a:rPr lang="en-US" sz="1200" dirty="0"/>
+                  <a:t>Reset</a:t>
+                </a:r>
+              </a:p>
+              <a:p>
+                <a:r>
+                  <a:rPr lang="en-US" sz="1200" dirty="0" err="1"/>
+                  <a:t>Rows_cleared</a:t>
+                </a:r>
+                <a:endParaRPr lang="en-US" sz="1200" dirty="0"/>
+              </a:p>
+              <a:p>
+                <a:r>
+                  <a:rPr lang="en-US" sz="1200" dirty="0" err="1"/>
+                  <a:t>Clear_pulse</a:t>
+                </a:r>
+                <a:endParaRPr lang="en-US" sz="1200" dirty="0"/>
+              </a:p>
+            </p:txBody>
+          </p:sp>
+        </p:grpSp>
+        <p:sp>
+          <p:nvSpPr>
+            <p:cNvPr id="17" name="TextBox 16">
+              <a:extLst>
+                <a:ext uri="{FF2B5EF4-FFF2-40B4-BE49-F238E27FC236}">
+                  <a16:creationId xmlns:a16="http://schemas.microsoft.com/office/drawing/2014/main" id="{D61652DC-9234-7BC3-2E09-DDFC7AEE6A03}"/>
+                </a:ext>
+              </a:extLst>
+            </p:cNvPr>
+            <p:cNvSpPr txBox="1"/>
+            <p:nvPr/>
+          </p:nvSpPr>
+          <p:spPr>
+            <a:xfrm>
+              <a:off x="3776585" y="438109"/>
+              <a:ext cx="1367645" cy="461665"/>
+            </a:xfrm>
+            <a:prstGeom prst="rect">
+              <a:avLst/>
+            </a:prstGeom>
+            <a:noFill/>
+          </p:spPr>
+          <p:txBody>
+            <a:bodyPr wrap="square" rtlCol="0">
+              <a:spAutoFit/>
+            </a:bodyPr>
+            <a:lstStyle/>
+            <a:p>
+              <a:r>
+                <a:rPr lang="en-US" sz="1200" dirty="0" err="1"/>
+                <a:t>Lines_total</a:t>
+              </a:r>
+              <a:endParaRPr lang="en-US" sz="1200" dirty="0"/>
+            </a:p>
+            <a:p>
+              <a:r>
+                <a:rPr lang="en-US" sz="1200" dirty="0"/>
+                <a:t>score</a:t>
+              </a:r>
+            </a:p>
+          </p:txBody>
+        </p:sp>
+      </p:grpSp>
+      <p:cxnSp>
+        <p:nvCxnSpPr>
+          <p:cNvPr id="29" name="Connector: Elbow 28">
+            <a:extLst>
+              <a:ext uri="{FF2B5EF4-FFF2-40B4-BE49-F238E27FC236}">
+                <a16:creationId xmlns:a16="http://schemas.microsoft.com/office/drawing/2014/main" id="{B714976D-1E2B-A9F9-C798-8E891A109B82}"/>
+              </a:ext>
+            </a:extLst>
+          </p:cNvPr>
+          <p:cNvCxnSpPr/>
+          <p:nvPr/>
+        </p:nvCxnSpPr>
+        <p:spPr>
+          <a:xfrm flipV="1">
+            <a:off x="7266787" y="4592460"/>
+            <a:ext cx="583971" cy="533419"/>
+          </a:xfrm>
+          <a:prstGeom prst="bentConnector3">
+            <a:avLst/>
+          </a:prstGeom>
+          <a:ln>
+            <a:tailEnd type="triangle"/>
+          </a:ln>
+        </p:spPr>
+        <p:style>
+          <a:lnRef idx="2">
+            <a:schemeClr val="accent1"/>
+          </a:lnRef>
+          <a:fillRef idx="0">
+            <a:schemeClr val="accent1"/>
+          </a:fillRef>
+          <a:effectRef idx="1">
+            <a:schemeClr val="accent1"/>
+          </a:effectRef>
+          <a:fontRef idx="minor">
+            <a:schemeClr val="tx1"/>
+          </a:fontRef>
+        </p:style>
+      </p:cxnSp>
+      <p:grpSp>
+        <p:nvGrpSpPr>
+          <p:cNvPr id="31" name="Group 30">
+            <a:extLst>
+              <a:ext uri="{FF2B5EF4-FFF2-40B4-BE49-F238E27FC236}">
+                <a16:creationId xmlns:a16="http://schemas.microsoft.com/office/drawing/2014/main" id="{A699118E-8BB2-DBB2-CF50-BF3B77AEA218}"/>
+              </a:ext>
+            </a:extLst>
+          </p:cNvPr>
+          <p:cNvGrpSpPr/>
+          <p:nvPr/>
+        </p:nvGrpSpPr>
+        <p:grpSpPr>
+          <a:xfrm>
+            <a:off x="2238822" y="4795891"/>
+            <a:ext cx="2503149" cy="1133585"/>
+            <a:chOff x="2641081" y="94236"/>
+            <a:chExt cx="2503149" cy="1133585"/>
+          </a:xfrm>
+        </p:grpSpPr>
+        <p:grpSp>
+          <p:nvGrpSpPr>
+            <p:cNvPr id="33" name="Group 32">
+              <a:extLst>
+                <a:ext uri="{FF2B5EF4-FFF2-40B4-BE49-F238E27FC236}">
+                  <a16:creationId xmlns:a16="http://schemas.microsoft.com/office/drawing/2014/main" id="{6F8F56D4-4521-66B6-6054-C932FC7FB3DC}"/>
+                </a:ext>
+              </a:extLst>
+            </p:cNvPr>
+            <p:cNvGrpSpPr/>
+            <p:nvPr/>
+          </p:nvGrpSpPr>
+          <p:grpSpPr>
+            <a:xfrm>
+              <a:off x="2641081" y="94236"/>
+              <a:ext cx="2201350" cy="1133585"/>
+              <a:chOff x="2641081" y="94236"/>
+              <a:chExt cx="2201350" cy="1133585"/>
+            </a:xfrm>
+          </p:grpSpPr>
+          <p:sp>
+            <p:nvSpPr>
+              <p:cNvPr id="36" name="Rectangle 35">
+                <a:extLst>
+                  <a:ext uri="{FF2B5EF4-FFF2-40B4-BE49-F238E27FC236}">
+                    <a16:creationId xmlns:a16="http://schemas.microsoft.com/office/drawing/2014/main" id="{12353D24-C506-CA2F-A68A-381D00CA85C7}"/>
+                  </a:ext>
+                </a:extLst>
+              </p:cNvPr>
+              <p:cNvSpPr/>
+              <p:nvPr/>
+            </p:nvSpPr>
+            <p:spPr>
+              <a:xfrm>
+                <a:off x="2641082" y="94237"/>
+                <a:ext cx="2201349" cy="1133584"/>
+              </a:xfrm>
+              <a:prstGeom prst="rect">
+                <a:avLst/>
+              </a:prstGeom>
+              <a:solidFill>
+                <a:schemeClr val="bg1"/>
+              </a:solidFill>
+            </p:spPr>
+            <p:style>
+              <a:lnRef idx="2">
+                <a:schemeClr val="accent1">
+                  <a:shade val="15000"/>
+                </a:schemeClr>
+              </a:lnRef>
+              <a:fillRef idx="1">
+                <a:schemeClr val="accent1"/>
+              </a:fillRef>
+              <a:effectRef idx="0">
+                <a:schemeClr val="accent1"/>
+              </a:effectRef>
+              <a:fontRef idx="minor">
+                <a:schemeClr val="lt1"/>
+              </a:fontRef>
+            </p:style>
+            <p:txBody>
+              <a:bodyPr rtlCol="0" anchor="ctr"/>
+              <a:lstStyle/>
+              <a:p>
+                <a:pPr algn="ctr"/>
+                <a:endParaRPr lang="en-US" dirty="0"/>
+              </a:p>
+            </p:txBody>
+          </p:sp>
+          <p:sp>
+            <p:nvSpPr>
+              <p:cNvPr id="37" name="TextBox 36">
+                <a:extLst>
+                  <a:ext uri="{FF2B5EF4-FFF2-40B4-BE49-F238E27FC236}">
+                    <a16:creationId xmlns:a16="http://schemas.microsoft.com/office/drawing/2014/main" id="{7297764F-B9EF-75C0-0126-7387E38257D2}"/>
+                  </a:ext>
+                </a:extLst>
+              </p:cNvPr>
+              <p:cNvSpPr txBox="1"/>
+              <p:nvPr/>
+            </p:nvSpPr>
+            <p:spPr>
+              <a:xfrm>
+                <a:off x="2641081" y="94236"/>
+                <a:ext cx="2136136" cy="369332"/>
+              </a:xfrm>
+              <a:prstGeom prst="rect">
+                <a:avLst/>
+              </a:prstGeom>
+              <a:noFill/>
+            </p:spPr>
+            <p:txBody>
+              <a:bodyPr wrap="square" rtlCol="0">
+                <a:spAutoFit/>
+              </a:bodyPr>
+              <a:lstStyle/>
+              <a:p>
+                <a:r>
+                  <a:rPr lang="en-US" b="1" dirty="0"/>
+                  <a:t>Piece Randomizer</a:t>
+                </a:r>
+              </a:p>
+            </p:txBody>
+          </p:sp>
+          <p:sp>
+            <p:nvSpPr>
+              <p:cNvPr id="38" name="TextBox 37">
+                <a:extLst>
+                  <a:ext uri="{FF2B5EF4-FFF2-40B4-BE49-F238E27FC236}">
+                    <a16:creationId xmlns:a16="http://schemas.microsoft.com/office/drawing/2014/main" id="{B298547E-1EE8-89D2-126C-4C0AAE11AD4F}"/>
+                  </a:ext>
+                </a:extLst>
+              </p:cNvPr>
+              <p:cNvSpPr txBox="1"/>
+              <p:nvPr/>
+            </p:nvSpPr>
+            <p:spPr>
+              <a:xfrm>
+                <a:off x="2644990" y="396823"/>
+                <a:ext cx="1367645" cy="461665"/>
+              </a:xfrm>
+              <a:prstGeom prst="rect">
+                <a:avLst/>
+              </a:prstGeom>
+              <a:noFill/>
+            </p:spPr>
+            <p:txBody>
+              <a:bodyPr wrap="square" rtlCol="0">
+                <a:spAutoFit/>
+              </a:bodyPr>
+              <a:lstStyle/>
+              <a:p>
+                <a:r>
+                  <a:rPr lang="en-US" sz="1200" dirty="0" err="1"/>
+                  <a:t>Clk</a:t>
+                </a:r>
+                <a:endParaRPr lang="en-US" sz="1200" dirty="0"/>
+              </a:p>
+              <a:p>
+                <a:r>
+                  <a:rPr lang="en-US" sz="1200" dirty="0"/>
+                  <a:t>Reset</a:t>
+                </a:r>
+              </a:p>
+            </p:txBody>
+          </p:sp>
+        </p:grpSp>
+        <p:sp>
+          <p:nvSpPr>
+            <p:cNvPr id="34" name="TextBox 33">
+              <a:extLst>
+                <a:ext uri="{FF2B5EF4-FFF2-40B4-BE49-F238E27FC236}">
+                  <a16:creationId xmlns:a16="http://schemas.microsoft.com/office/drawing/2014/main" id="{D9A9E23A-C556-3690-2A97-A724F52ED66F}"/>
+                </a:ext>
+              </a:extLst>
+            </p:cNvPr>
+            <p:cNvSpPr txBox="1"/>
+            <p:nvPr/>
+          </p:nvSpPr>
+          <p:spPr>
+            <a:xfrm>
+              <a:off x="3776585" y="438109"/>
+              <a:ext cx="1367645" cy="276999"/>
+            </a:xfrm>
+            <a:prstGeom prst="rect">
+              <a:avLst/>
+            </a:prstGeom>
+            <a:noFill/>
+          </p:spPr>
+          <p:txBody>
+            <a:bodyPr wrap="square" rtlCol="0">
+              <a:spAutoFit/>
+            </a:bodyPr>
+            <a:lstStyle/>
+            <a:p>
+              <a:r>
+                <a:rPr lang="en-US" sz="1200" dirty="0" err="1"/>
+                <a:t>Rand_piece</a:t>
+              </a:r>
+              <a:endParaRPr lang="en-US" sz="1200" dirty="0"/>
+            </a:p>
+          </p:txBody>
+        </p:sp>
+      </p:grpSp>
+      <p:sp>
+        <p:nvSpPr>
+          <p:cNvPr id="84" name="Freeform: Shape 83">
+            <a:extLst>
+              <a:ext uri="{FF2B5EF4-FFF2-40B4-BE49-F238E27FC236}">
+                <a16:creationId xmlns:a16="http://schemas.microsoft.com/office/drawing/2014/main" id="{2F6AB154-3B10-55D5-E825-2FA5122DF828}"/>
+              </a:ext>
+            </a:extLst>
+          </p:cNvPr>
+          <p:cNvSpPr/>
+          <p:nvPr/>
+        </p:nvSpPr>
+        <p:spPr>
+          <a:xfrm>
+            <a:off x="4445000" y="1485900"/>
+            <a:ext cx="825518" cy="3962400"/>
+          </a:xfrm>
+          <a:custGeom>
+            <a:avLst/>
+            <a:gdLst>
+              <a:gd name="csX0" fmla="*/ 0 w 825518"/>
+              <a:gd name="csY0" fmla="*/ 3962400 h 3962400"/>
+              <a:gd name="csX1" fmla="*/ 139700 w 825518"/>
+              <a:gd name="csY1" fmla="*/ 3505200 h 3962400"/>
+              <a:gd name="csX2" fmla="*/ 152400 w 825518"/>
+              <a:gd name="csY2" fmla="*/ 3149600 h 3962400"/>
+              <a:gd name="csX3" fmla="*/ 177800 w 825518"/>
+              <a:gd name="csY3" fmla="*/ 2959100 h 3962400"/>
+              <a:gd name="csX4" fmla="*/ 203200 w 825518"/>
+              <a:gd name="csY4" fmla="*/ 2247900 h 3962400"/>
+              <a:gd name="csX5" fmla="*/ 215900 w 825518"/>
+              <a:gd name="csY5" fmla="*/ 1219200 h 3962400"/>
+              <a:gd name="csX6" fmla="*/ 266700 w 825518"/>
+              <a:gd name="csY6" fmla="*/ 1054100 h 3962400"/>
+              <a:gd name="csX7" fmla="*/ 292100 w 825518"/>
+              <a:gd name="csY7" fmla="*/ 889000 h 3962400"/>
+              <a:gd name="csX8" fmla="*/ 317500 w 825518"/>
+              <a:gd name="csY8" fmla="*/ 800100 h 3962400"/>
+              <a:gd name="csX9" fmla="*/ 368300 w 825518"/>
+              <a:gd name="csY9" fmla="*/ 635000 h 3962400"/>
+              <a:gd name="csX10" fmla="*/ 381000 w 825518"/>
+              <a:gd name="csY10" fmla="*/ 469900 h 3962400"/>
+              <a:gd name="csX11" fmla="*/ 406400 w 825518"/>
+              <a:gd name="csY11" fmla="*/ 393700 h 3962400"/>
+              <a:gd name="csX12" fmla="*/ 431800 w 825518"/>
+              <a:gd name="csY12" fmla="*/ 279400 h 3962400"/>
+              <a:gd name="csX13" fmla="*/ 482600 w 825518"/>
+              <a:gd name="csY13" fmla="*/ 165100 h 3962400"/>
+              <a:gd name="csX14" fmla="*/ 495300 w 825518"/>
+              <a:gd name="csY14" fmla="*/ 127000 h 3962400"/>
+              <a:gd name="csX15" fmla="*/ 533400 w 825518"/>
+              <a:gd name="csY15" fmla="*/ 114300 h 3962400"/>
+              <a:gd name="csX16" fmla="*/ 584200 w 825518"/>
+              <a:gd name="csY16" fmla="*/ 88900 h 3962400"/>
+              <a:gd name="csX17" fmla="*/ 622300 w 825518"/>
+              <a:gd name="csY17" fmla="*/ 63500 h 3962400"/>
+              <a:gd name="csX18" fmla="*/ 673100 w 825518"/>
+              <a:gd name="csY18" fmla="*/ 50800 h 3962400"/>
+              <a:gd name="csX19" fmla="*/ 711200 w 825518"/>
+              <a:gd name="csY19" fmla="*/ 25400 h 3962400"/>
+              <a:gd name="csX20" fmla="*/ 825500 w 825518"/>
+              <a:gd name="csY20" fmla="*/ 0 h 3962400"/>
+            </a:gdLst>
+            <a:ahLst/>
+            <a:cxnLst>
+              <a:cxn ang="0">
+                <a:pos x="csX0" y="csY0"/>
+              </a:cxn>
+              <a:cxn ang="0">
+                <a:pos x="csX1" y="csY1"/>
+              </a:cxn>
+              <a:cxn ang="0">
+                <a:pos x="csX2" y="csY2"/>
+              </a:cxn>
+              <a:cxn ang="0">
+                <a:pos x="csX3" y="csY3"/>
+              </a:cxn>
+              <a:cxn ang="0">
+                <a:pos x="csX4" y="csY4"/>
+              </a:cxn>
+              <a:cxn ang="0">
+                <a:pos x="csX5" y="csY5"/>
+              </a:cxn>
+              <a:cxn ang="0">
+                <a:pos x="csX6" y="csY6"/>
+              </a:cxn>
+              <a:cxn ang="0">
+                <a:pos x="csX7" y="csY7"/>
+              </a:cxn>
+              <a:cxn ang="0">
+                <a:pos x="csX8" y="csY8"/>
+              </a:cxn>
+              <a:cxn ang="0">
+                <a:pos x="csX9" y="csY9"/>
+              </a:cxn>
+              <a:cxn ang="0">
+                <a:pos x="csX10" y="csY10"/>
+              </a:cxn>
+              <a:cxn ang="0">
+                <a:pos x="csX11" y="csY11"/>
+              </a:cxn>
+              <a:cxn ang="0">
+                <a:pos x="csX12" y="csY12"/>
+              </a:cxn>
+              <a:cxn ang="0">
+                <a:pos x="csX13" y="csY13"/>
+              </a:cxn>
+              <a:cxn ang="0">
+                <a:pos x="csX14" y="csY14"/>
+              </a:cxn>
+              <a:cxn ang="0">
+                <a:pos x="csX15" y="csY15"/>
+              </a:cxn>
+              <a:cxn ang="0">
+                <a:pos x="csX16" y="csY16"/>
+              </a:cxn>
+              <a:cxn ang="0">
+                <a:pos x="csX17" y="csY17"/>
+              </a:cxn>
+              <a:cxn ang="0">
+                <a:pos x="csX18" y="csY18"/>
+              </a:cxn>
+              <a:cxn ang="0">
+                <a:pos x="csX19" y="csY19"/>
+              </a:cxn>
+              <a:cxn ang="0">
+                <a:pos x="csX20" y="csY20"/>
+              </a:cxn>
+            </a:cxnLst>
+            <a:rect l="l" t="t" r="r" b="b"/>
+            <a:pathLst>
+              <a:path w="825518" h="3962400">
+                <a:moveTo>
+                  <a:pt x="0" y="3962400"/>
+                </a:moveTo>
+                <a:cubicBezTo>
+                  <a:pt x="132383" y="3609378"/>
+                  <a:pt x="96461" y="3764632"/>
+                  <a:pt x="139700" y="3505200"/>
+                </a:cubicBezTo>
+                <a:cubicBezTo>
+                  <a:pt x="143933" y="3386667"/>
+                  <a:pt x="144145" y="3267921"/>
+                  <a:pt x="152400" y="3149600"/>
+                </a:cubicBezTo>
+                <a:cubicBezTo>
+                  <a:pt x="156859" y="3085693"/>
+                  <a:pt x="174753" y="3023089"/>
+                  <a:pt x="177800" y="2959100"/>
+                </a:cubicBezTo>
+                <a:cubicBezTo>
+                  <a:pt x="219064" y="2092550"/>
+                  <a:pt x="160613" y="2588593"/>
+                  <a:pt x="203200" y="2247900"/>
+                </a:cubicBezTo>
+                <a:cubicBezTo>
+                  <a:pt x="207433" y="1905000"/>
+                  <a:pt x="204347" y="1561931"/>
+                  <a:pt x="215900" y="1219200"/>
+                </a:cubicBezTo>
+                <a:cubicBezTo>
+                  <a:pt x="218542" y="1140817"/>
+                  <a:pt x="246808" y="1120407"/>
+                  <a:pt x="266700" y="1054100"/>
+                </a:cubicBezTo>
+                <a:cubicBezTo>
+                  <a:pt x="284206" y="995747"/>
+                  <a:pt x="279707" y="950965"/>
+                  <a:pt x="292100" y="889000"/>
+                </a:cubicBezTo>
+                <a:cubicBezTo>
+                  <a:pt x="298144" y="858779"/>
+                  <a:pt x="309559" y="829879"/>
+                  <a:pt x="317500" y="800100"/>
+                </a:cubicBezTo>
+                <a:cubicBezTo>
+                  <a:pt x="354615" y="660919"/>
+                  <a:pt x="325896" y="741011"/>
+                  <a:pt x="368300" y="635000"/>
+                </a:cubicBezTo>
+                <a:cubicBezTo>
+                  <a:pt x="372533" y="579967"/>
+                  <a:pt x="372392" y="524420"/>
+                  <a:pt x="381000" y="469900"/>
+                </a:cubicBezTo>
+                <a:cubicBezTo>
+                  <a:pt x="385176" y="443454"/>
+                  <a:pt x="399355" y="419531"/>
+                  <a:pt x="406400" y="393700"/>
+                </a:cubicBezTo>
+                <a:cubicBezTo>
+                  <a:pt x="442654" y="260767"/>
+                  <a:pt x="397586" y="393446"/>
+                  <a:pt x="431800" y="279400"/>
+                </a:cubicBezTo>
+                <a:cubicBezTo>
+                  <a:pt x="480947" y="115576"/>
+                  <a:pt x="431562" y="267176"/>
+                  <a:pt x="482600" y="165100"/>
+                </a:cubicBezTo>
+                <a:cubicBezTo>
+                  <a:pt x="488587" y="153126"/>
+                  <a:pt x="485834" y="136466"/>
+                  <a:pt x="495300" y="127000"/>
+                </a:cubicBezTo>
+                <a:cubicBezTo>
+                  <a:pt x="504766" y="117534"/>
+                  <a:pt x="521095" y="119573"/>
+                  <a:pt x="533400" y="114300"/>
+                </a:cubicBezTo>
+                <a:cubicBezTo>
+                  <a:pt x="550801" y="106842"/>
+                  <a:pt x="567762" y="98293"/>
+                  <a:pt x="584200" y="88900"/>
+                </a:cubicBezTo>
+                <a:cubicBezTo>
+                  <a:pt x="597452" y="81327"/>
+                  <a:pt x="608271" y="69513"/>
+                  <a:pt x="622300" y="63500"/>
+                </a:cubicBezTo>
+                <a:cubicBezTo>
+                  <a:pt x="638343" y="56624"/>
+                  <a:pt x="656167" y="55033"/>
+                  <a:pt x="673100" y="50800"/>
+                </a:cubicBezTo>
+                <a:cubicBezTo>
+                  <a:pt x="685800" y="42333"/>
+                  <a:pt x="696392" y="29102"/>
+                  <a:pt x="711200" y="25400"/>
+                </a:cubicBezTo>
+                <a:cubicBezTo>
+                  <a:pt x="829707" y="-4227"/>
+                  <a:pt x="825500" y="52852"/>
+                  <a:pt x="825500" y="0"/>
+                </a:cubicBezTo>
+              </a:path>
+            </a:pathLst>
+          </a:custGeom>
+          <a:noFill/>
+        </p:spPr>
+        <p:style>
+          <a:lnRef idx="2">
+            <a:schemeClr val="accent1">
+              <a:shade val="15000"/>
+            </a:schemeClr>
+          </a:lnRef>
+          <a:fillRef idx="1">
+            <a:schemeClr val="accent1"/>
+          </a:fillRef>
+          <a:effectRef idx="0">
+            <a:schemeClr val="accent1"/>
+          </a:effectRef>
+          <a:fontRef idx="minor">
+            <a:schemeClr val="lt1"/>
+          </a:fontRef>
+        </p:style>
+        <p:txBody>
+          <a:bodyPr rtlCol="0" anchor="ctr"/>
+          <a:lstStyle/>
+          <a:p>
+            <a:pPr algn="ctr"/>
+            <a:endParaRPr lang="en-US"/>
+          </a:p>
+        </p:txBody>
+      </p:sp>
     </p:spTree>
     <p:extLst>
       <p:ext uri="{BB962C8B-B14F-4D97-AF65-F5344CB8AC3E}">
